--- a/files/2026dsa_team10.pptx
+++ b/files/2026dsa_team10.pptx
@@ -112,17 +112,25 @@
 </p:presentation>
 </file>
 
+<file path=ppt/revisionInfo.xml><?xml version="1.0" encoding="utf-8"?>
+<p1510:revInfo xmlns:a="http://schemas.openxmlformats.org/drawingml/2006/main" xmlns:r="http://schemas.openxmlformats.org/officeDocument/2006/relationships" xmlns:p1510="http://schemas.microsoft.com/office/powerpoint/2015/10/main">
+  <p1510:revLst>
+    <p1510:client id="{30F65BD2-1B9C-4FB7-92D6-5920AE571694}" v="15" dt="2026-04-29T16:23:15.408"/>
+  </p1510:revLst>
+</p1510:revInfo>
+</file>
+
 <file path=ppt/changesInfos/changesInfo1.xml><?xml version="1.0" encoding="utf-8"?>
 <pc:chgInfo xmlns:a="http://schemas.openxmlformats.org/drawingml/2006/main" xmlns:r="http://schemas.openxmlformats.org/officeDocument/2006/relationships" xmlns:ac="http://schemas.microsoft.com/office/drawing/2013/main/command" xmlns:pc="http://schemas.microsoft.com/office/powerpoint/2013/main/command">
   <pc:docChgLst>
     <pc:chgData name="Amit Godara" userId="44d962cb-8b94-4622-9c1c-c7e2903e05cb" providerId="ADAL" clId="{4C863A64-E2DE-4D13-A2EB-2DB6506242C0}"/>
-    <pc:docChg chg="modSld">
-      <pc:chgData name="Amit Godara" userId="44d962cb-8b94-4622-9c1c-c7e2903e05cb" providerId="ADAL" clId="{4C863A64-E2DE-4D13-A2EB-2DB6506242C0}" dt="2026-04-17T12:52:48.940" v="39" actId="6549"/>
+    <pc:docChg chg="undo custSel modSld">
+      <pc:chgData name="Amit Godara" userId="44d962cb-8b94-4622-9c1c-c7e2903e05cb" providerId="ADAL" clId="{4C863A64-E2DE-4D13-A2EB-2DB6506242C0}" dt="2026-04-29T16:24:14.995" v="102" actId="20577"/>
       <pc:docMkLst>
         <pc:docMk/>
       </pc:docMkLst>
       <pc:sldChg chg="modSp mod">
-        <pc:chgData name="Amit Godara" userId="44d962cb-8b94-4622-9c1c-c7e2903e05cb" providerId="ADAL" clId="{4C863A64-E2DE-4D13-A2EB-2DB6506242C0}" dt="2026-04-17T12:52:48.940" v="39" actId="6549"/>
+        <pc:chgData name="Amit Godara" userId="44d962cb-8b94-4622-9c1c-c7e2903e05cb" providerId="ADAL" clId="{4C863A64-E2DE-4D13-A2EB-2DB6506242C0}" dt="2026-04-29T16:24:14.995" v="102" actId="20577"/>
         <pc:sldMkLst>
           <pc:docMk/>
           <pc:sldMk cId="2610447289" sldId="256"/>
@@ -135,12 +143,28 @@
             <ac:spMk id="5" creationId="{8E736061-A4AA-B48C-18BA-DA6B6FB44BF9}"/>
           </ac:spMkLst>
         </pc:spChg>
-        <pc:graphicFrameChg chg="modGraphic">
-          <ac:chgData name="Amit Godara" userId="44d962cb-8b94-4622-9c1c-c7e2903e05cb" providerId="ADAL" clId="{4C863A64-E2DE-4D13-A2EB-2DB6506242C0}" dt="2026-04-17T12:52:48.940" v="39" actId="6549"/>
+        <pc:spChg chg="mod">
+          <ac:chgData name="Amit Godara" userId="44d962cb-8b94-4622-9c1c-c7e2903e05cb" providerId="ADAL" clId="{4C863A64-E2DE-4D13-A2EB-2DB6506242C0}" dt="2026-04-29T16:16:24.068" v="66" actId="20577"/>
+          <ac:spMkLst>
+            <pc:docMk/>
+            <pc:sldMk cId="2610447289" sldId="256"/>
+            <ac:spMk id="10" creationId="{C8B5BC3C-B1E0-FC52-37D1-7C19A3D4BDD4}"/>
+          </ac:spMkLst>
+        </pc:spChg>
+        <pc:graphicFrameChg chg="mod modGraphic">
+          <ac:chgData name="Amit Godara" userId="44d962cb-8b94-4622-9c1c-c7e2903e05cb" providerId="ADAL" clId="{4C863A64-E2DE-4D13-A2EB-2DB6506242C0}" dt="2026-04-29T16:16:11.380" v="62"/>
           <ac:graphicFrameMkLst>
             <pc:docMk/>
             <pc:sldMk cId="2610447289" sldId="256"/>
             <ac:graphicFrameMk id="6" creationId="{CEE73D54-F153-79B3-B5A0-66E5948D1A2E}"/>
+          </ac:graphicFrameMkLst>
+        </pc:graphicFrameChg>
+        <pc:graphicFrameChg chg="mod modGraphic">
+          <ac:chgData name="Amit Godara" userId="44d962cb-8b94-4622-9c1c-c7e2903e05cb" providerId="ADAL" clId="{4C863A64-E2DE-4D13-A2EB-2DB6506242C0}" dt="2026-04-29T16:24:14.995" v="102" actId="20577"/>
+          <ac:graphicFrameMkLst>
+            <pc:docMk/>
+            <pc:sldMk cId="2610447289" sldId="256"/>
+            <ac:graphicFrameMk id="8" creationId="{3B7C0BA6-6354-D5DC-430B-E336741F8828}"/>
           </ac:graphicFrameMkLst>
         </pc:graphicFrameChg>
       </pc:sldChg>
@@ -296,7 +320,7 @@
           <a:p>
             <a:fld id="{854E60CA-E60B-3C4A-A6C2-C45FCFAB7068}" type="datetimeFigureOut">
               <a:rPr lang="en-US" smtClean="0"/>
-              <a:t>4/17/2026</a:t>
+              <a:t>4/29/2026</a:t>
             </a:fld>
             <a:endParaRPr lang="en-US"/>
           </a:p>
@@ -494,7 +518,7 @@
           <a:p>
             <a:fld id="{854E60CA-E60B-3C4A-A6C2-C45FCFAB7068}" type="datetimeFigureOut">
               <a:rPr lang="en-US" smtClean="0"/>
-              <a:t>4/17/2026</a:t>
+              <a:t>4/29/2026</a:t>
             </a:fld>
             <a:endParaRPr lang="en-US"/>
           </a:p>
@@ -702,7 +726,7 @@
           <a:p>
             <a:fld id="{854E60CA-E60B-3C4A-A6C2-C45FCFAB7068}" type="datetimeFigureOut">
               <a:rPr lang="en-US" smtClean="0"/>
-              <a:t>4/17/2026</a:t>
+              <a:t>4/29/2026</a:t>
             </a:fld>
             <a:endParaRPr lang="en-US"/>
           </a:p>
@@ -900,7 +924,7 @@
           <a:p>
             <a:fld id="{854E60CA-E60B-3C4A-A6C2-C45FCFAB7068}" type="datetimeFigureOut">
               <a:rPr lang="en-US" smtClean="0"/>
-              <a:t>4/17/2026</a:t>
+              <a:t>4/29/2026</a:t>
             </a:fld>
             <a:endParaRPr lang="en-US"/>
           </a:p>
@@ -1175,7 +1199,7 @@
           <a:p>
             <a:fld id="{854E60CA-E60B-3C4A-A6C2-C45FCFAB7068}" type="datetimeFigureOut">
               <a:rPr lang="en-US" smtClean="0"/>
-              <a:t>4/17/2026</a:t>
+              <a:t>4/29/2026</a:t>
             </a:fld>
             <a:endParaRPr lang="en-US"/>
           </a:p>
@@ -1440,7 +1464,7 @@
           <a:p>
             <a:fld id="{854E60CA-E60B-3C4A-A6C2-C45FCFAB7068}" type="datetimeFigureOut">
               <a:rPr lang="en-US" smtClean="0"/>
-              <a:t>4/17/2026</a:t>
+              <a:t>4/29/2026</a:t>
             </a:fld>
             <a:endParaRPr lang="en-US"/>
           </a:p>
@@ -1852,7 +1876,7 @@
           <a:p>
             <a:fld id="{854E60CA-E60B-3C4A-A6C2-C45FCFAB7068}" type="datetimeFigureOut">
               <a:rPr lang="en-US" smtClean="0"/>
-              <a:t>4/17/2026</a:t>
+              <a:t>4/29/2026</a:t>
             </a:fld>
             <a:endParaRPr lang="en-US"/>
           </a:p>
@@ -1993,7 +2017,7 @@
           <a:p>
             <a:fld id="{854E60CA-E60B-3C4A-A6C2-C45FCFAB7068}" type="datetimeFigureOut">
               <a:rPr lang="en-US" smtClean="0"/>
-              <a:t>4/17/2026</a:t>
+              <a:t>4/29/2026</a:t>
             </a:fld>
             <a:endParaRPr lang="en-US"/>
           </a:p>
@@ -2106,7 +2130,7 @@
           <a:p>
             <a:fld id="{854E60CA-E60B-3C4A-A6C2-C45FCFAB7068}" type="datetimeFigureOut">
               <a:rPr lang="en-US" smtClean="0"/>
-              <a:t>4/17/2026</a:t>
+              <a:t>4/29/2026</a:t>
             </a:fld>
             <a:endParaRPr lang="en-US"/>
           </a:p>
@@ -2417,7 +2441,7 @@
           <a:p>
             <a:fld id="{854E60CA-E60B-3C4A-A6C2-C45FCFAB7068}" type="datetimeFigureOut">
               <a:rPr lang="en-US" smtClean="0"/>
-              <a:t>4/17/2026</a:t>
+              <a:t>4/29/2026</a:t>
             </a:fld>
             <a:endParaRPr lang="en-US"/>
           </a:p>
@@ -2705,7 +2729,7 @@
           <a:p>
             <a:fld id="{854E60CA-E60B-3C4A-A6C2-C45FCFAB7068}" type="datetimeFigureOut">
               <a:rPr lang="en-US" smtClean="0"/>
-              <a:t>4/17/2026</a:t>
+              <a:t>4/29/2026</a:t>
             </a:fld>
             <a:endParaRPr lang="en-US"/>
           </a:p>
@@ -2946,7 +2970,7 @@
           <a:p>
             <a:fld id="{854E60CA-E60B-3C4A-A6C2-C45FCFAB7068}" type="datetimeFigureOut">
               <a:rPr lang="en-US" smtClean="0"/>
-              <a:t>4/17/2026</a:t>
+              <a:t>4/29/2026</a:t>
             </a:fld>
             <a:endParaRPr lang="en-US"/>
           </a:p>
@@ -3468,7 +3492,7 @@
           <p:nvPr>
             <p:extLst>
               <p:ext uri="{D42A27DB-BD31-4B8C-83A1-F6EECF244321}">
-                <p14:modId xmlns:p14="http://schemas.microsoft.com/office/powerpoint/2010/main" val="3533126324"/>
+                <p14:modId xmlns:p14="http://schemas.microsoft.com/office/powerpoint/2010/main" val="3438764425"/>
               </p:ext>
             </p:extLst>
           </p:nvPr>
@@ -3593,7 +3617,10 @@
                     <a:bodyPr/>
                     <a:lstStyle/>
                     <a:p>
-                      <a:endParaRPr lang="en-US" sz="2400" dirty="0"/>
+                      <a:r>
+                        <a:rPr lang="en-US" sz="2400" dirty="0"/>
+                        <a:t>0.646</a:t>
+                      </a:r>
                     </a:p>
                   </a:txBody>
                   <a:tcPr/>
@@ -3603,7 +3630,10 @@
                     <a:bodyPr/>
                     <a:lstStyle/>
                     <a:p>
-                      <a:endParaRPr lang="en-US" sz="2400" dirty="0"/>
+                      <a:r>
+                        <a:rPr lang="en-US" sz="2400" dirty="0"/>
+                        <a:t>1.861</a:t>
+                      </a:r>
                     </a:p>
                   </a:txBody>
                   <a:tcPr/>
@@ -3620,6 +3650,10 @@
                     <a:bodyPr/>
                     <a:lstStyle/>
                     <a:p>
+                      <a:r>
+                        <a:rPr lang="en-US" sz="2400" dirty="0" err="1"/>
+                        <a:t>glmnet</a:t>
+                      </a:r>
                       <a:endParaRPr lang="en-US" sz="2400" dirty="0"/>
                     </a:p>
                   </a:txBody>
@@ -3630,7 +3664,10 @@
                     <a:bodyPr/>
                     <a:lstStyle/>
                     <a:p>
-                      <a:endParaRPr lang="en-US" sz="2400" dirty="0"/>
+                      <a:r>
+                        <a:rPr lang="en-US" sz="2400" dirty="0"/>
+                        <a:t>0.424</a:t>
+                      </a:r>
                     </a:p>
                   </a:txBody>
                   <a:tcPr/>
@@ -3640,7 +3677,10 @@
                     <a:bodyPr/>
                     <a:lstStyle/>
                     <a:p>
-                      <a:endParaRPr lang="en-US" sz="2400" dirty="0"/>
+                      <a:r>
+                        <a:rPr lang="en-US" sz="2400" dirty="0"/>
+                        <a:t>2.364</a:t>
+                      </a:r>
                     </a:p>
                   </a:txBody>
                   <a:tcPr/>
@@ -3670,14 +3710,14 @@
           <p:nvPr>
             <p:extLst>
               <p:ext uri="{D42A27DB-BD31-4B8C-83A1-F6EECF244321}">
-                <p14:modId xmlns:p14="http://schemas.microsoft.com/office/powerpoint/2010/main" val="2827846898"/>
+                <p14:modId xmlns:p14="http://schemas.microsoft.com/office/powerpoint/2010/main" val="985634624"/>
               </p:ext>
             </p:extLst>
           </p:nvPr>
         </p:nvGraphicFramePr>
         <p:xfrm>
           <a:off x="5514417" y="1466415"/>
-          <a:ext cx="6118606" cy="4754880"/>
+          <a:ext cx="6118606" cy="5303520"/>
         </p:xfrm>
         <a:graphic>
           <a:graphicData uri="http://schemas.openxmlformats.org/drawingml/2006/table">
@@ -3768,8 +3808,8 @@
                     <a:lstStyle/>
                     <a:p>
                       <a:r>
-                        <a:rPr lang="en-US" sz="2000" dirty="0"/>
-                        <a:t>Month, mean/sum</a:t>
+                        <a:rPr lang="en-US" sz="1400" dirty="0"/>
+                        <a:t>growing season mean/sum weather + soil join</a:t>
                       </a:r>
                     </a:p>
                   </a:txBody>
@@ -3802,7 +3842,7 @@
                     <a:p>
                       <a:r>
                         <a:rPr lang="en-US" sz="2000" dirty="0"/>
-                        <a:t>72</a:t>
+                        <a:t>22</a:t>
                       </a:r>
                     </a:p>
                   </a:txBody>
@@ -3835,7 +3875,7 @@
                     <a:p>
                       <a:r>
                         <a:rPr lang="en-US" sz="2000" dirty="0"/>
-                        <a:t>70/30</a:t>
+                        <a:t>grouped 5 fold CV</a:t>
                       </a:r>
                     </a:p>
                   </a:txBody>
@@ -3867,9 +3907,10 @@
                     <a:lstStyle/>
                     <a:p>
                       <a:r>
-                        <a:rPr lang="en-US" sz="2000" dirty="0"/>
+                        <a:rPr lang="en-US" sz="2000"/>
                         <a:t>Stratified</a:t>
                       </a:r>
+                      <a:endParaRPr lang="en-US" sz="2000" dirty="0"/>
                     </a:p>
                   </a:txBody>
                   <a:tcPr/>
@@ -3901,7 +3942,7 @@
                     <a:p>
                       <a:r>
                         <a:rPr lang="en-US" sz="2000" dirty="0" err="1"/>
-                        <a:t>strenght_gtex</a:t>
+                        <a:t>site_year</a:t>
                       </a:r>
                       <a:endParaRPr lang="en-US" sz="2000" dirty="0"/>
                     </a:p>
@@ -3934,8 +3975,8 @@
                     <a:lstStyle/>
                     <a:p>
                       <a:r>
-                        <a:rPr lang="en-US" sz="2000" dirty="0"/>
-                        <a:t>Normalized, PCA</a:t>
+                        <a:rPr lang="en-US" sz="1600" dirty="0"/>
+                        <a:t>Median imputation, dummy encoding</a:t>
                       </a:r>
                     </a:p>
                   </a:txBody>
@@ -3967,18 +4008,50 @@
                     <a:lstStyle/>
                     <a:p>
                       <a:r>
-                        <a:rPr lang="en-US" sz="2000" dirty="0" err="1"/>
-                        <a:t>Mtry</a:t>
+                        <a:rPr lang="en-US" sz="1200" dirty="0" err="1"/>
+                        <a:t>tree_depth</a:t>
                       </a:r>
                       <a:r>
-                        <a:rPr lang="en-US" sz="2000" dirty="0"/>
+                        <a:rPr lang="en-US" sz="1200" dirty="0"/>
                         <a:t>, </a:t>
                       </a:r>
                       <a:r>
-                        <a:rPr lang="en-US" sz="2000" dirty="0" err="1"/>
-                        <a:t>ntrees</a:t>
+                        <a:rPr lang="en-US" sz="1200" dirty="0" err="1"/>
+                        <a:t>learn_rate</a:t>
                       </a:r>
-                      <a:endParaRPr lang="en-US" sz="2000" dirty="0"/>
+                      <a:r>
+                        <a:rPr lang="en-US" sz="1200" dirty="0"/>
+                        <a:t>, </a:t>
+                      </a:r>
+                      <a:r>
+                        <a:rPr lang="en-US" sz="1200" dirty="0" err="1"/>
+                        <a:t>loss_reduction</a:t>
+                      </a:r>
+                      <a:r>
+                        <a:rPr lang="en-US" sz="1200" dirty="0"/>
+                        <a:t>, </a:t>
+                      </a:r>
+                      <a:r>
+                        <a:rPr lang="en-US" sz="1200" dirty="0" err="1"/>
+                        <a:t>min_n</a:t>
+                      </a:r>
+                      <a:r>
+                        <a:rPr lang="en-US" sz="1200" dirty="0"/>
+                        <a:t>, </a:t>
+                      </a:r>
+                      <a:r>
+                        <a:rPr lang="en-US" sz="1200" dirty="0" err="1"/>
+                        <a:t>sample_size</a:t>
+                      </a:r>
+                      <a:r>
+                        <a:rPr lang="en-US" sz="1200" dirty="0"/>
+                        <a:t>, </a:t>
+                      </a:r>
+                      <a:r>
+                        <a:rPr lang="en-US" sz="1200" dirty="0" err="1"/>
+                        <a:t>mtry</a:t>
+                      </a:r>
+                      <a:endParaRPr lang="en-US" sz="1200" dirty="0"/>
                     </a:p>
                   </a:txBody>
                   <a:tcPr/>
@@ -4010,7 +4083,7 @@
                     <a:p>
                       <a:r>
                         <a:rPr lang="en-US" sz="2000" dirty="0"/>
-                        <a:t>Sim. annealing</a:t>
+                        <a:t>Space-filling grid</a:t>
                       </a:r>
                     </a:p>
                   </a:txBody>
@@ -4076,7 +4149,7 @@
                     <a:p>
                       <a:r>
                         <a:rPr lang="en-US" sz="2000" dirty="0"/>
-                        <a:t>R2</a:t>
+                        <a:t>RMSE</a:t>
                       </a:r>
                     </a:p>
                   </a:txBody>
@@ -4210,8 +4283,13 @@
             <a:pPr algn="ctr"/>
             <a:r>
               <a:rPr lang="en-US" sz="2400" dirty="0"/>
-              <a:t>Best model parameters</a:t>
-            </a:r>
+              <a:t>Best model parameters: </a:t>
+            </a:r>
+            <a:r>
+              <a:rPr lang="en-US" sz="2400" dirty="0" err="1"/>
+              <a:t>XGBoost</a:t>
+            </a:r>
+            <a:endParaRPr lang="en-US" sz="2400" dirty="0"/>
           </a:p>
         </p:txBody>
       </p:sp>
